--- a/test/pptx/blanks/just-speaker-notes/templated.pptx
+++ b/test/pptx/blanks/just-speaker-notes/templated.pptx
@@ -540,6 +540,9 @@
       </p:sp>
     </p:spTree>
   </p:cSld>
+  <p:clrMapOvr>
+    <a:masterClrMapping/>
+  </p:clrMapOvr>
 </p:notes>
 </file>
 
